--- a/examples/auditcert-france-2026/slides.pptx
+++ b/examples/auditcert-france-2026/slides.pptx
@@ -4787,8 +4787,8 @@
         </p:nvSpPr>
         <p:spPr>
           <a:xfrm>
-            <a:off x="0" y="6010275"/>
-            <a:ext cx="12192000" cy="847725"/>
+            <a:off x="0" y="6000750"/>
+            <a:ext cx="12192000" cy="857250"/>
           </a:xfrm>
           <a:prstGeom prst="rect">
             <a:avLst/>
@@ -4831,8 +4831,8 @@
         </p:nvSpPr>
         <p:spPr>
           <a:xfrm>
-            <a:off x="685800" y="6457950"/>
-            <a:ext cx="6918293" cy="423862"/>
+            <a:off x="685800" y="6460331"/>
+            <a:ext cx="6918293" cy="438150"/>
           </a:xfrm>
           <a:prstGeom prst="rect">
             <a:avLst/>
@@ -4876,8 +4876,8 @@
         </p:nvSpPr>
         <p:spPr>
           <a:xfrm>
-            <a:off x="685800" y="6231731"/>
-            <a:ext cx="6975443" cy="150018"/>
+            <a:off x="685800" y="6229350"/>
+            <a:ext cx="6975443" cy="164306"/>
           </a:xfrm>
           <a:prstGeom prst="rect">
             <a:avLst/>
@@ -4892,7 +4892,7 @@
           <a:p>
             <a:pPr algn="l">
               <a:lnSpc>
-                <a:spcPts val="1181"/>
+                <a:spcPts val="1293"/>
               </a:lnSpc>
               <a:spcBef>
                 <a:spcPts val="0"/>
@@ -4902,7 +4902,7 @@
               </a:spcAft>
             </a:pPr>
             <a:r>
-              <a:rPr sz="787" b="0" i="0" spc="110">
+              <a:rPr sz="862" b="0" i="0" spc="121">
                 <a:solidFill>
                   <a:srgbClr val="C2A0AE"/>
                 </a:solidFill>
@@ -4921,8 +4921,8 @@
         </p:nvSpPr>
         <p:spPr>
           <a:xfrm>
-            <a:off x="8137493" y="6457950"/>
-            <a:ext cx="1120806" cy="423862"/>
+            <a:off x="8137493" y="6460331"/>
+            <a:ext cx="1120806" cy="438150"/>
           </a:xfrm>
           <a:prstGeom prst="rect">
             <a:avLst/>
@@ -4966,8 +4966,8 @@
         </p:nvSpPr>
         <p:spPr>
           <a:xfrm>
-            <a:off x="8137493" y="6231731"/>
-            <a:ext cx="1177956" cy="150018"/>
+            <a:off x="8137493" y="6229350"/>
+            <a:ext cx="1177956" cy="164306"/>
           </a:xfrm>
           <a:prstGeom prst="rect">
             <a:avLst/>
@@ -4982,7 +4982,7 @@
           <a:p>
             <a:pPr algn="l">
               <a:lnSpc>
-                <a:spcPts val="1181"/>
+                <a:spcPts val="1293"/>
               </a:lnSpc>
               <a:spcBef>
                 <a:spcPts val="0"/>
@@ -4992,7 +4992,7 @@
               </a:spcAft>
             </a:pPr>
             <a:r>
-              <a:rPr sz="787" b="0" i="0" spc="110">
+              <a:rPr sz="862" b="0" i="0" spc="121">
                 <a:solidFill>
                   <a:srgbClr val="C2A0AE"/>
                 </a:solidFill>
@@ -5019,7 +5019,7 @@
         </p:blipFill>
         <p:spPr>
           <a:xfrm>
-            <a:off x="9791700" y="6219825"/>
+            <a:off x="9791700" y="6215062"/>
             <a:ext cx="1714500" cy="428625"/>
           </a:xfrm>
           <a:prstGeom prst="rect">
@@ -5227,12 +5227,12 @@
         </p:nvSpPr>
         <p:spPr>
           <a:xfrm>
-            <a:off x="609600" y="2130933"/>
-            <a:ext cx="10972800" cy="2819400"/>
+            <a:off x="609600" y="2116645"/>
+            <a:ext cx="10972800" cy="2847975"/>
           </a:xfrm>
           <a:prstGeom prst="roundRect">
             <a:avLst>
-              <a:gd name="adj" fmla="val 3378"/>
+              <a:gd name="adj" fmla="val 3344"/>
             </a:avLst>
           </a:prstGeom>
           <a:noFill/>
@@ -5273,8 +5273,8 @@
         </p:nvSpPr>
         <p:spPr>
           <a:xfrm>
-            <a:off x="809625" y="2064258"/>
-            <a:ext cx="5888069" cy="114300"/>
+            <a:off x="809625" y="2049970"/>
+            <a:ext cx="6147911" cy="114300"/>
           </a:xfrm>
           <a:prstGeom prst="rect">
             <a:avLst/>
@@ -5316,7 +5316,7 @@
               </a:spcAft>
             </a:pPr>
             <a:r>
-              <a:rPr sz="825" b="1" i="0" spc="82">
+              <a:rPr sz="862" b="1" i="0" spc="86">
                 <a:solidFill>
                   <a:srgbClr val="5F1937"/>
                 </a:solidFill>
@@ -5335,12 +5335,12 @@
         </p:nvSpPr>
         <p:spPr>
           <a:xfrm>
-            <a:off x="847725" y="2397633"/>
-            <a:ext cx="2524125" cy="2352675"/>
+            <a:off x="847725" y="2383345"/>
+            <a:ext cx="2524125" cy="2381250"/>
           </a:xfrm>
           <a:prstGeom prst="roundRect">
             <a:avLst>
-              <a:gd name="adj" fmla="val 4048"/>
+              <a:gd name="adj" fmla="val 4000"/>
             </a:avLst>
           </a:prstGeom>
           <a:noFill/>
@@ -5381,7 +5381,7 @@
         </p:nvSpPr>
         <p:spPr>
           <a:xfrm>
-            <a:off x="857250" y="2407158"/>
+            <a:off x="857250" y="2392870"/>
             <a:ext cx="2505075" cy="390525"/>
           </a:xfrm>
           <a:prstGeom prst="rect">
@@ -5433,7 +5433,7 @@
         </p:blipFill>
         <p:spPr>
           <a:xfrm>
-            <a:off x="981075" y="2502408"/>
+            <a:off x="981075" y="2488120"/>
             <a:ext cx="200025" cy="200025"/>
           </a:xfrm>
           <a:prstGeom prst="rect">
@@ -5449,7 +5449,7 @@
         </p:nvSpPr>
         <p:spPr>
           <a:xfrm>
-            <a:off x="1266825" y="2521458"/>
+            <a:off x="1266825" y="2507170"/>
             <a:ext cx="1915001" cy="161925"/>
           </a:xfrm>
           <a:prstGeom prst="rect">
@@ -5491,8 +5491,8 @@
         </p:nvSpPr>
         <p:spPr>
           <a:xfrm>
-            <a:off x="857250" y="2797683"/>
-            <a:ext cx="2505075" cy="647700"/>
+            <a:off x="857250" y="2783395"/>
+            <a:ext cx="2505075" cy="657225"/>
           </a:xfrm>
           <a:prstGeom prst="rect">
             <a:avLst/>
@@ -5533,7 +5533,7 @@
         </p:nvSpPr>
         <p:spPr>
           <a:xfrm>
-            <a:off x="857250" y="2797683"/>
+            <a:off x="857250" y="2783395"/>
             <a:ext cx="2505075" cy="9525"/>
           </a:xfrm>
           <a:prstGeom prst="rect">
@@ -5577,8 +5577,8 @@
         </p:nvSpPr>
         <p:spPr>
           <a:xfrm>
-            <a:off x="981075" y="2892933"/>
-            <a:ext cx="2314575" cy="104775"/>
+            <a:off x="981075" y="2878645"/>
+            <a:ext cx="2314575" cy="114300"/>
           </a:xfrm>
           <a:prstGeom prst="rect">
             <a:avLst/>
@@ -5600,7 +5600,7 @@
               </a:spcAft>
             </a:pPr>
             <a:r>
-              <a:rPr sz="712" b="1" i="0" spc="64">
+              <a:rPr sz="862" b="1" i="0" spc="78">
                 <a:solidFill>
                   <a:srgbClr val="5F1937"/>
                 </a:solidFill>
@@ -5619,7 +5619,7 @@
         </p:nvSpPr>
         <p:spPr>
           <a:xfrm>
-            <a:off x="981075" y="3035808"/>
+            <a:off x="981075" y="3031045"/>
             <a:ext cx="2257425" cy="333375"/>
           </a:xfrm>
           <a:prstGeom prst="rect">
@@ -5664,8 +5664,8 @@
         </p:nvSpPr>
         <p:spPr>
           <a:xfrm>
-            <a:off x="857250" y="3445383"/>
-            <a:ext cx="2505075" cy="647700"/>
+            <a:off x="857250" y="3440620"/>
+            <a:ext cx="2505075" cy="657225"/>
           </a:xfrm>
           <a:prstGeom prst="rect">
             <a:avLst/>
@@ -5706,7 +5706,7 @@
         </p:nvSpPr>
         <p:spPr>
           <a:xfrm>
-            <a:off x="857250" y="3445383"/>
+            <a:off x="857250" y="3440620"/>
             <a:ext cx="2505075" cy="9525"/>
           </a:xfrm>
           <a:prstGeom prst="rect">
@@ -5750,8 +5750,8 @@
         </p:nvSpPr>
         <p:spPr>
           <a:xfrm>
-            <a:off x="981075" y="3540633"/>
-            <a:ext cx="2314575" cy="104775"/>
+            <a:off x="981075" y="3535870"/>
+            <a:ext cx="2314575" cy="114300"/>
           </a:xfrm>
           <a:prstGeom prst="rect">
             <a:avLst/>
@@ -5773,7 +5773,7 @@
               </a:spcAft>
             </a:pPr>
             <a:r>
-              <a:rPr sz="712" b="1" i="0" spc="64">
+              <a:rPr sz="862" b="1" i="0" spc="78">
                 <a:solidFill>
                   <a:srgbClr val="5F1937"/>
                 </a:solidFill>
@@ -5792,7 +5792,7 @@
         </p:nvSpPr>
         <p:spPr>
           <a:xfrm>
-            <a:off x="981075" y="3683508"/>
+            <a:off x="981075" y="3688270"/>
             <a:ext cx="2257425" cy="333375"/>
           </a:xfrm>
           <a:prstGeom prst="rect">
@@ -5837,8 +5837,8 @@
         </p:nvSpPr>
         <p:spPr>
           <a:xfrm>
-            <a:off x="857250" y="4093083"/>
-            <a:ext cx="2505075" cy="647700"/>
+            <a:off x="857250" y="4097845"/>
+            <a:ext cx="2505075" cy="657225"/>
           </a:xfrm>
           <a:prstGeom prst="rect">
             <a:avLst/>
@@ -5879,7 +5879,7 @@
         </p:nvSpPr>
         <p:spPr>
           <a:xfrm>
-            <a:off x="857250" y="4093083"/>
+            <a:off x="857250" y="4097845"/>
             <a:ext cx="2505075" cy="9525"/>
           </a:xfrm>
           <a:prstGeom prst="rect">
@@ -5923,8 +5923,8 @@
         </p:nvSpPr>
         <p:spPr>
           <a:xfrm>
-            <a:off x="981075" y="4188333"/>
-            <a:ext cx="2314575" cy="104775"/>
+            <a:off x="981075" y="4193095"/>
+            <a:ext cx="2314575" cy="114300"/>
           </a:xfrm>
           <a:prstGeom prst="rect">
             <a:avLst/>
@@ -5946,7 +5946,7 @@
               </a:spcAft>
             </a:pPr>
             <a:r>
-              <a:rPr sz="712" b="1" i="0" spc="64">
+              <a:rPr sz="862" b="1" i="0" spc="78">
                 <a:solidFill>
                   <a:srgbClr val="5F1937"/>
                 </a:solidFill>
@@ -5965,7 +5965,7 @@
         </p:nvSpPr>
         <p:spPr>
           <a:xfrm>
-            <a:off x="981075" y="4331208"/>
+            <a:off x="981075" y="4345495"/>
             <a:ext cx="2257425" cy="333375"/>
           </a:xfrm>
           <a:prstGeom prst="rect">
@@ -6010,12 +6010,12 @@
         </p:nvSpPr>
         <p:spPr>
           <a:xfrm>
-            <a:off x="3505200" y="2397633"/>
-            <a:ext cx="2524125" cy="2352675"/>
+            <a:off x="3505200" y="2383345"/>
+            <a:ext cx="2524125" cy="2381250"/>
           </a:xfrm>
           <a:prstGeom prst="roundRect">
             <a:avLst>
-              <a:gd name="adj" fmla="val 4048"/>
+              <a:gd name="adj" fmla="val 4000"/>
             </a:avLst>
           </a:prstGeom>
           <a:noFill/>
@@ -6056,7 +6056,7 @@
         </p:nvSpPr>
         <p:spPr>
           <a:xfrm>
-            <a:off x="3514725" y="2407158"/>
+            <a:off x="3514725" y="2392870"/>
             <a:ext cx="2505075" cy="390525"/>
           </a:xfrm>
           <a:prstGeom prst="rect">
@@ -6108,7 +6108,7 @@
         </p:blipFill>
         <p:spPr>
           <a:xfrm>
-            <a:off x="3638550" y="2502408"/>
+            <a:off x="3638550" y="2488120"/>
             <a:ext cx="200025" cy="200025"/>
           </a:xfrm>
           <a:prstGeom prst="rect">
@@ -6124,7 +6124,7 @@
         </p:nvSpPr>
         <p:spPr>
           <a:xfrm>
-            <a:off x="3924300" y="2521458"/>
+            <a:off x="3924300" y="2507170"/>
             <a:ext cx="1459706" cy="161925"/>
           </a:xfrm>
           <a:prstGeom prst="rect">
@@ -6166,8 +6166,8 @@
         </p:nvSpPr>
         <p:spPr>
           <a:xfrm>
-            <a:off x="3514725" y="2797683"/>
-            <a:ext cx="2505075" cy="647700"/>
+            <a:off x="3514725" y="2783395"/>
+            <a:ext cx="2505075" cy="657225"/>
           </a:xfrm>
           <a:prstGeom prst="rect">
             <a:avLst/>
@@ -6208,7 +6208,7 @@
         </p:nvSpPr>
         <p:spPr>
           <a:xfrm>
-            <a:off x="3514725" y="2797683"/>
+            <a:off x="3514725" y="2783395"/>
             <a:ext cx="2505075" cy="9525"/>
           </a:xfrm>
           <a:prstGeom prst="rect">
@@ -6252,8 +6252,8 @@
         </p:nvSpPr>
         <p:spPr>
           <a:xfrm>
-            <a:off x="3638550" y="2892933"/>
-            <a:ext cx="2314575" cy="104775"/>
+            <a:off x="3638550" y="2878645"/>
+            <a:ext cx="2314575" cy="114300"/>
           </a:xfrm>
           <a:prstGeom prst="rect">
             <a:avLst/>
@@ -6275,7 +6275,7 @@
               </a:spcAft>
             </a:pPr>
             <a:r>
-              <a:rPr sz="712" b="1" i="0" spc="64">
+              <a:rPr sz="862" b="1" i="0" spc="78">
                 <a:solidFill>
                   <a:srgbClr val="5F1937"/>
                 </a:solidFill>
@@ -6294,7 +6294,7 @@
         </p:nvSpPr>
         <p:spPr>
           <a:xfrm>
-            <a:off x="3638550" y="3035808"/>
+            <a:off x="3638550" y="3031045"/>
             <a:ext cx="2257425" cy="333375"/>
           </a:xfrm>
           <a:prstGeom prst="rect">
@@ -6339,8 +6339,8 @@
         </p:nvSpPr>
         <p:spPr>
           <a:xfrm>
-            <a:off x="3514725" y="3445383"/>
-            <a:ext cx="2505075" cy="647700"/>
+            <a:off x="3514725" y="3440620"/>
+            <a:ext cx="2505075" cy="657225"/>
           </a:xfrm>
           <a:prstGeom prst="rect">
             <a:avLst/>
@@ -6381,7 +6381,7 @@
         </p:nvSpPr>
         <p:spPr>
           <a:xfrm>
-            <a:off x="3514725" y="3445383"/>
+            <a:off x="3514725" y="3440620"/>
             <a:ext cx="2505075" cy="9525"/>
           </a:xfrm>
           <a:prstGeom prst="rect">
@@ -6425,8 +6425,8 @@
         </p:nvSpPr>
         <p:spPr>
           <a:xfrm>
-            <a:off x="3638550" y="3540633"/>
-            <a:ext cx="2314575" cy="104775"/>
+            <a:off x="3638550" y="3535870"/>
+            <a:ext cx="2314575" cy="114300"/>
           </a:xfrm>
           <a:prstGeom prst="rect">
             <a:avLst/>
@@ -6448,7 +6448,7 @@
               </a:spcAft>
             </a:pPr>
             <a:r>
-              <a:rPr sz="712" b="1" i="0" spc="64">
+              <a:rPr sz="862" b="1" i="0" spc="78">
                 <a:solidFill>
                   <a:srgbClr val="5F1937"/>
                 </a:solidFill>
@@ -6467,7 +6467,7 @@
         </p:nvSpPr>
         <p:spPr>
           <a:xfrm>
-            <a:off x="3638550" y="3683508"/>
+            <a:off x="3638550" y="3688270"/>
             <a:ext cx="2257425" cy="333375"/>
           </a:xfrm>
           <a:prstGeom prst="rect">
@@ -6512,8 +6512,8 @@
         </p:nvSpPr>
         <p:spPr>
           <a:xfrm>
-            <a:off x="3514725" y="4093083"/>
-            <a:ext cx="2505075" cy="647700"/>
+            <a:off x="3514725" y="4097845"/>
+            <a:ext cx="2505075" cy="657225"/>
           </a:xfrm>
           <a:prstGeom prst="rect">
             <a:avLst/>
@@ -6554,7 +6554,7 @@
         </p:nvSpPr>
         <p:spPr>
           <a:xfrm>
-            <a:off x="3514725" y="4093083"/>
+            <a:off x="3514725" y="4097845"/>
             <a:ext cx="2505075" cy="9525"/>
           </a:xfrm>
           <a:prstGeom prst="rect">
@@ -6598,8 +6598,8 @@
         </p:nvSpPr>
         <p:spPr>
           <a:xfrm>
-            <a:off x="3638550" y="4188333"/>
-            <a:ext cx="2314575" cy="104775"/>
+            <a:off x="3638550" y="4193095"/>
+            <a:ext cx="2314575" cy="114300"/>
           </a:xfrm>
           <a:prstGeom prst="rect">
             <a:avLst/>
@@ -6621,7 +6621,7 @@
               </a:spcAft>
             </a:pPr>
             <a:r>
-              <a:rPr sz="712" b="1" i="0" spc="64">
+              <a:rPr sz="862" b="1" i="0" spc="78">
                 <a:solidFill>
                   <a:srgbClr val="5F1937"/>
                 </a:solidFill>
@@ -6640,7 +6640,7 @@
         </p:nvSpPr>
         <p:spPr>
           <a:xfrm>
-            <a:off x="3638550" y="4331208"/>
+            <a:off x="3638550" y="4345495"/>
             <a:ext cx="2257425" cy="333375"/>
           </a:xfrm>
           <a:prstGeom prst="rect">
@@ -6685,12 +6685,12 @@
         </p:nvSpPr>
         <p:spPr>
           <a:xfrm>
-            <a:off x="6162675" y="2397633"/>
-            <a:ext cx="2524125" cy="2352675"/>
+            <a:off x="6162675" y="2383345"/>
+            <a:ext cx="2524125" cy="2381250"/>
           </a:xfrm>
           <a:prstGeom prst="roundRect">
             <a:avLst>
-              <a:gd name="adj" fmla="val 4048"/>
+              <a:gd name="adj" fmla="val 4000"/>
             </a:avLst>
           </a:prstGeom>
           <a:noFill/>
@@ -6731,7 +6731,7 @@
         </p:nvSpPr>
         <p:spPr>
           <a:xfrm>
-            <a:off x="6172200" y="2407158"/>
+            <a:off x="6172200" y="2392870"/>
             <a:ext cx="2505075" cy="390525"/>
           </a:xfrm>
           <a:prstGeom prst="rect">
@@ -6783,7 +6783,7 @@
         </p:blipFill>
         <p:spPr>
           <a:xfrm>
-            <a:off x="6296025" y="2502408"/>
+            <a:off x="6296025" y="2488120"/>
             <a:ext cx="200025" cy="200025"/>
           </a:xfrm>
           <a:prstGeom prst="rect">
@@ -6799,7 +6799,7 @@
         </p:nvSpPr>
         <p:spPr>
           <a:xfrm>
-            <a:off x="6581775" y="2521458"/>
+            <a:off x="6581775" y="2507170"/>
             <a:ext cx="1660969" cy="161925"/>
           </a:xfrm>
           <a:prstGeom prst="rect">
@@ -6841,8 +6841,8 @@
         </p:nvSpPr>
         <p:spPr>
           <a:xfrm>
-            <a:off x="6172200" y="2797683"/>
-            <a:ext cx="2505075" cy="647700"/>
+            <a:off x="6172200" y="2783395"/>
+            <a:ext cx="2505075" cy="657225"/>
           </a:xfrm>
           <a:prstGeom prst="rect">
             <a:avLst/>
@@ -6883,7 +6883,7 @@
         </p:nvSpPr>
         <p:spPr>
           <a:xfrm>
-            <a:off x="6172200" y="2797683"/>
+            <a:off x="6172200" y="2783395"/>
             <a:ext cx="2505075" cy="9525"/>
           </a:xfrm>
           <a:prstGeom prst="rect">
@@ -6927,8 +6927,8 @@
         </p:nvSpPr>
         <p:spPr>
           <a:xfrm>
-            <a:off x="6296025" y="2892933"/>
-            <a:ext cx="2314575" cy="104775"/>
+            <a:off x="6296025" y="2878645"/>
+            <a:ext cx="2314575" cy="114300"/>
           </a:xfrm>
           <a:prstGeom prst="rect">
             <a:avLst/>
@@ -6950,7 +6950,7 @@
               </a:spcAft>
             </a:pPr>
             <a:r>
-              <a:rPr sz="712" b="1" i="0" spc="64">
+              <a:rPr sz="862" b="1" i="0" spc="78">
                 <a:solidFill>
                   <a:srgbClr val="5F1937"/>
                 </a:solidFill>
@@ -6969,7 +6969,7 @@
         </p:nvSpPr>
         <p:spPr>
           <a:xfrm>
-            <a:off x="6296025" y="3035808"/>
+            <a:off x="6296025" y="3031045"/>
             <a:ext cx="2257425" cy="333375"/>
           </a:xfrm>
           <a:prstGeom prst="rect">
@@ -7014,8 +7014,8 @@
         </p:nvSpPr>
         <p:spPr>
           <a:xfrm>
-            <a:off x="6172200" y="3445383"/>
-            <a:ext cx="2505075" cy="647700"/>
+            <a:off x="6172200" y="3440620"/>
+            <a:ext cx="2505075" cy="657225"/>
           </a:xfrm>
           <a:prstGeom prst="rect">
             <a:avLst/>
@@ -7056,7 +7056,7 @@
         </p:nvSpPr>
         <p:spPr>
           <a:xfrm>
-            <a:off x="6172200" y="3445383"/>
+            <a:off x="6172200" y="3440620"/>
             <a:ext cx="2505075" cy="9525"/>
           </a:xfrm>
           <a:prstGeom prst="rect">
@@ -7100,8 +7100,8 @@
         </p:nvSpPr>
         <p:spPr>
           <a:xfrm>
-            <a:off x="6296025" y="3540633"/>
-            <a:ext cx="2314575" cy="104775"/>
+            <a:off x="6296025" y="3535870"/>
+            <a:ext cx="2314575" cy="114300"/>
           </a:xfrm>
           <a:prstGeom prst="rect">
             <a:avLst/>
@@ -7123,7 +7123,7 @@
               </a:spcAft>
             </a:pPr>
             <a:r>
-              <a:rPr sz="712" b="1" i="0" spc="64">
+              <a:rPr sz="862" b="1" i="0" spc="78">
                 <a:solidFill>
                   <a:srgbClr val="5F1937"/>
                 </a:solidFill>
@@ -7142,7 +7142,7 @@
         </p:nvSpPr>
         <p:spPr>
           <a:xfrm>
-            <a:off x="6296025" y="3683508"/>
+            <a:off x="6296025" y="3688270"/>
             <a:ext cx="2257425" cy="333375"/>
           </a:xfrm>
           <a:prstGeom prst="rect">
@@ -7187,8 +7187,8 @@
         </p:nvSpPr>
         <p:spPr>
           <a:xfrm>
-            <a:off x="6172200" y="4093083"/>
-            <a:ext cx="2505075" cy="647700"/>
+            <a:off x="6172200" y="4097845"/>
+            <a:ext cx="2505075" cy="657225"/>
           </a:xfrm>
           <a:prstGeom prst="rect">
             <a:avLst/>
@@ -7229,7 +7229,7 @@
         </p:nvSpPr>
         <p:spPr>
           <a:xfrm>
-            <a:off x="6172200" y="4093083"/>
+            <a:off x="6172200" y="4097845"/>
             <a:ext cx="2505075" cy="9525"/>
           </a:xfrm>
           <a:prstGeom prst="rect">
@@ -7273,8 +7273,8 @@
         </p:nvSpPr>
         <p:spPr>
           <a:xfrm>
-            <a:off x="6296025" y="4188333"/>
-            <a:ext cx="2314575" cy="104775"/>
+            <a:off x="6296025" y="4193095"/>
+            <a:ext cx="2314575" cy="114300"/>
           </a:xfrm>
           <a:prstGeom prst="rect">
             <a:avLst/>
@@ -7296,7 +7296,7 @@
               </a:spcAft>
             </a:pPr>
             <a:r>
-              <a:rPr sz="712" b="1" i="0" spc="64">
+              <a:rPr sz="862" b="1" i="0" spc="78">
                 <a:solidFill>
                   <a:srgbClr val="5F1937"/>
                 </a:solidFill>
@@ -7315,7 +7315,7 @@
         </p:nvSpPr>
         <p:spPr>
           <a:xfrm>
-            <a:off x="6296025" y="4331208"/>
+            <a:off x="6296025" y="4345495"/>
             <a:ext cx="2257425" cy="333375"/>
           </a:xfrm>
           <a:prstGeom prst="rect">
@@ -7360,12 +7360,12 @@
         </p:nvSpPr>
         <p:spPr>
           <a:xfrm>
-            <a:off x="8820150" y="2397633"/>
-            <a:ext cx="2524125" cy="2352675"/>
+            <a:off x="8820150" y="2383345"/>
+            <a:ext cx="2524125" cy="2381250"/>
           </a:xfrm>
           <a:prstGeom prst="roundRect">
             <a:avLst>
-              <a:gd name="adj" fmla="val 4048"/>
+              <a:gd name="adj" fmla="val 4000"/>
             </a:avLst>
           </a:prstGeom>
           <a:noFill/>
@@ -7406,7 +7406,7 @@
         </p:nvSpPr>
         <p:spPr>
           <a:xfrm>
-            <a:off x="8829675" y="2407158"/>
+            <a:off x="8829675" y="2392870"/>
             <a:ext cx="2505075" cy="390525"/>
           </a:xfrm>
           <a:prstGeom prst="rect">
@@ -7458,7 +7458,7 @@
         </p:blipFill>
         <p:spPr>
           <a:xfrm>
-            <a:off x="8953500" y="2502408"/>
+            <a:off x="8953500" y="2488120"/>
             <a:ext cx="200025" cy="200025"/>
           </a:xfrm>
           <a:prstGeom prst="rect">
@@ -7474,7 +7474,7 @@
         </p:nvSpPr>
         <p:spPr>
           <a:xfrm>
-            <a:off x="9239250" y="2521458"/>
+            <a:off x="9239250" y="2507170"/>
             <a:ext cx="1597056" cy="161925"/>
           </a:xfrm>
           <a:prstGeom prst="rect">
@@ -7516,8 +7516,8 @@
         </p:nvSpPr>
         <p:spPr>
           <a:xfrm>
-            <a:off x="8829675" y="2797683"/>
-            <a:ext cx="2505075" cy="647700"/>
+            <a:off x="8829675" y="2783395"/>
+            <a:ext cx="2505075" cy="657225"/>
           </a:xfrm>
           <a:prstGeom prst="rect">
             <a:avLst/>
@@ -7558,7 +7558,7 @@
         </p:nvSpPr>
         <p:spPr>
           <a:xfrm>
-            <a:off x="8829675" y="2797683"/>
+            <a:off x="8829675" y="2783395"/>
             <a:ext cx="2505075" cy="9525"/>
           </a:xfrm>
           <a:prstGeom prst="rect">
@@ -7602,8 +7602,8 @@
         </p:nvSpPr>
         <p:spPr>
           <a:xfrm>
-            <a:off x="8953500" y="2892933"/>
-            <a:ext cx="2314575" cy="104775"/>
+            <a:off x="8953500" y="2878645"/>
+            <a:ext cx="2314575" cy="114300"/>
           </a:xfrm>
           <a:prstGeom prst="rect">
             <a:avLst/>
@@ -7625,7 +7625,7 @@
               </a:spcAft>
             </a:pPr>
             <a:r>
-              <a:rPr sz="712" b="1" i="0" spc="64">
+              <a:rPr sz="862" b="1" i="0" spc="78">
                 <a:solidFill>
                   <a:srgbClr val="8C5F1B"/>
                 </a:solidFill>
@@ -7644,7 +7644,7 @@
         </p:nvSpPr>
         <p:spPr>
           <a:xfrm>
-            <a:off x="8953500" y="3035808"/>
+            <a:off x="8953500" y="3031045"/>
             <a:ext cx="2314575" cy="333375"/>
           </a:xfrm>
           <a:prstGeom prst="rect">
@@ -7689,8 +7689,8 @@
         </p:nvSpPr>
         <p:spPr>
           <a:xfrm>
-            <a:off x="8829675" y="3445383"/>
-            <a:ext cx="2505075" cy="647700"/>
+            <a:off x="8829675" y="3440620"/>
+            <a:ext cx="2505075" cy="657225"/>
           </a:xfrm>
           <a:prstGeom prst="rect">
             <a:avLst/>
@@ -7731,7 +7731,7 @@
         </p:nvSpPr>
         <p:spPr>
           <a:xfrm>
-            <a:off x="8829675" y="3445383"/>
+            <a:off x="8829675" y="3440620"/>
             <a:ext cx="2505075" cy="9525"/>
           </a:xfrm>
           <a:prstGeom prst="rect">
@@ -7775,8 +7775,8 @@
         </p:nvSpPr>
         <p:spPr>
           <a:xfrm>
-            <a:off x="8953500" y="3540633"/>
-            <a:ext cx="2314575" cy="104775"/>
+            <a:off x="8953500" y="3535870"/>
+            <a:ext cx="2314575" cy="114300"/>
           </a:xfrm>
           <a:prstGeom prst="rect">
             <a:avLst/>
@@ -7798,7 +7798,7 @@
               </a:spcAft>
             </a:pPr>
             <a:r>
-              <a:rPr sz="712" b="1" i="0" spc="64">
+              <a:rPr sz="862" b="1" i="0" spc="78">
                 <a:solidFill>
                   <a:srgbClr val="8C5F1B"/>
                 </a:solidFill>
@@ -7817,7 +7817,7 @@
         </p:nvSpPr>
         <p:spPr>
           <a:xfrm>
-            <a:off x="8953500" y="3683508"/>
+            <a:off x="8953500" y="3688270"/>
             <a:ext cx="2257425" cy="333375"/>
           </a:xfrm>
           <a:prstGeom prst="rect">
@@ -7862,8 +7862,8 @@
         </p:nvSpPr>
         <p:spPr>
           <a:xfrm>
-            <a:off x="8829675" y="4093083"/>
-            <a:ext cx="2505075" cy="647700"/>
+            <a:off x="8829675" y="4097845"/>
+            <a:ext cx="2505075" cy="657225"/>
           </a:xfrm>
           <a:prstGeom prst="rect">
             <a:avLst/>
@@ -7904,7 +7904,7 @@
         </p:nvSpPr>
         <p:spPr>
           <a:xfrm>
-            <a:off x="8829675" y="4093083"/>
+            <a:off x="8829675" y="4097845"/>
             <a:ext cx="2505075" cy="9525"/>
           </a:xfrm>
           <a:prstGeom prst="rect">
@@ -7948,8 +7948,8 @@
         </p:nvSpPr>
         <p:spPr>
           <a:xfrm>
-            <a:off x="8953500" y="4188333"/>
-            <a:ext cx="2314575" cy="104775"/>
+            <a:off x="8953500" y="4193095"/>
+            <a:ext cx="2314575" cy="114300"/>
           </a:xfrm>
           <a:prstGeom prst="rect">
             <a:avLst/>
@@ -7971,7 +7971,7 @@
               </a:spcAft>
             </a:pPr>
             <a:r>
-              <a:rPr sz="712" b="1" i="0" spc="64">
+              <a:rPr sz="862" b="1" i="0" spc="78">
                 <a:solidFill>
                   <a:srgbClr val="8C5F1B"/>
                 </a:solidFill>
@@ -7990,7 +7990,7 @@
         </p:nvSpPr>
         <p:spPr>
           <a:xfrm>
-            <a:off x="8953500" y="4331208"/>
+            <a:off x="8953500" y="4345495"/>
             <a:ext cx="2257425" cy="333375"/>
           </a:xfrm>
           <a:prstGeom prst="rect">
@@ -8035,7 +8035,7 @@
         </p:nvSpPr>
         <p:spPr>
           <a:xfrm>
-            <a:off x="609600" y="5102733"/>
+            <a:off x="609600" y="5117020"/>
             <a:ext cx="10972800" cy="476250"/>
           </a:xfrm>
           <a:prstGeom prst="roundRect">
@@ -8642,7 +8642,7 @@
         <p:spPr>
           <a:xfrm>
             <a:off x="809625" y="2298477"/>
-            <a:ext cx="5104828" cy="114300"/>
+            <a:ext cx="5329047" cy="114300"/>
           </a:xfrm>
           <a:prstGeom prst="rect">
             <a:avLst/>
@@ -8684,7 +8684,7 @@
               </a:spcAft>
             </a:pPr>
             <a:r>
-              <a:rPr sz="825" b="1" i="0" spc="82">
+              <a:rPr sz="862" b="1" i="0" spc="86">
                 <a:solidFill>
                   <a:srgbClr val="5F1937"/>
                 </a:solidFill>
@@ -8796,7 +8796,7 @@
               </a:spcAft>
             </a:pPr>
             <a:r>
-              <a:rPr sz="825" b="1" i="0" spc="74">
+              <a:rPr sz="862" b="1" i="0" spc="78">
                 <a:solidFill>
                   <a:srgbClr val="FFFFFF"/>
                 </a:solidFill>
@@ -9085,7 +9085,7 @@
               </a:spcAft>
             </a:pPr>
             <a:r>
-              <a:rPr sz="825" b="1" i="0" spc="74">
+              <a:rPr sz="862" b="1" i="0" spc="78">
                 <a:solidFill>
                   <a:srgbClr val="FFFFFF"/>
                 </a:solidFill>
@@ -9383,7 +9383,7 @@
               </a:spcAft>
             </a:pPr>
             <a:r>
-              <a:rPr sz="825" b="1" i="0" spc="74">
+              <a:rPr sz="862" b="1" i="0" spc="78">
                 <a:solidFill>
                   <a:srgbClr val="FFFFFF"/>
                 </a:solidFill>
@@ -9672,7 +9672,7 @@
               </a:spcAft>
             </a:pPr>
             <a:r>
-              <a:rPr sz="825" b="1" i="0" spc="74">
+              <a:rPr sz="862" b="1" i="0" spc="78">
                 <a:solidFill>
                   <a:srgbClr val="FFFFFF"/>
                 </a:solidFill>
@@ -9961,7 +9961,7 @@
               </a:spcAft>
             </a:pPr>
             <a:r>
-              <a:rPr sz="825" b="1" i="0" spc="74">
+              <a:rPr sz="862" b="1" i="0" spc="78">
                 <a:solidFill>
                   <a:srgbClr val="FFFFFF"/>
                 </a:solidFill>
@@ -10147,7 +10147,7 @@
                 <a:srgbClr val="8C5F1B"/>
               </a:gs>
               <a:gs pos="100000">
-                <a:srgbClr val="C08A2E"/>
+                <a:srgbClr val="9D6D21"/>
               </a:gs>
             </a:gsLst>
             <a:lin scaled="0" ang="21000000"/>
@@ -10731,7 +10731,7 @@
         <p:spPr>
           <a:xfrm>
             <a:off x="809625" y="1714023"/>
-            <a:ext cx="5064728" cy="114300"/>
+            <a:ext cx="5287137" cy="114300"/>
           </a:xfrm>
           <a:prstGeom prst="rect">
             <a:avLst/>
@@ -10773,7 +10773,7 @@
               </a:spcAft>
             </a:pPr>
             <a:r>
-              <a:rPr sz="825" b="1" i="0" spc="82">
+              <a:rPr sz="862" b="1" i="0" spc="86">
                 <a:solidFill>
                   <a:srgbClr val="5F1937"/>
                 </a:solidFill>
@@ -13095,7 +13095,7 @@
         <p:spPr>
           <a:xfrm>
             <a:off x="809625" y="1626679"/>
-            <a:ext cx="5088445" cy="114300"/>
+            <a:ext cx="5311806" cy="114300"/>
           </a:xfrm>
           <a:prstGeom prst="rect">
             <a:avLst/>
@@ -13137,7 +13137,7 @@
               </a:spcAft>
             </a:pPr>
             <a:r>
-              <a:rPr sz="825" b="1" i="0" spc="82">
+              <a:rPr sz="862" b="1" i="0" spc="86">
                 <a:solidFill>
                   <a:srgbClr val="5F1937"/>
                 </a:solidFill>
@@ -14363,7 +14363,7 @@
         <p:spPr>
           <a:xfrm>
             <a:off x="809625" y="4419028"/>
-            <a:ext cx="4294727" cy="114300"/>
+            <a:ext cx="4482274" cy="114300"/>
           </a:xfrm>
           <a:prstGeom prst="rect">
             <a:avLst/>
@@ -14405,7 +14405,7 @@
               </a:spcAft>
             </a:pPr>
             <a:r>
-              <a:rPr sz="825" b="1" i="0" spc="82">
+              <a:rPr sz="862" b="1" i="0" spc="86">
                 <a:solidFill>
                   <a:srgbClr val="5F1937"/>
                 </a:solidFill>
@@ -14680,7 +14680,7 @@
         <p:spPr>
           <a:xfrm>
             <a:off x="6381750" y="4419028"/>
-            <a:ext cx="2008155" cy="114300"/>
+            <a:ext cx="2091594" cy="114300"/>
           </a:xfrm>
           <a:prstGeom prst="rect">
             <a:avLst/>
@@ -14722,7 +14722,7 @@
               </a:spcAft>
             </a:pPr>
             <a:r>
-              <a:rPr sz="825" b="1" i="0" spc="82">
+              <a:rPr sz="862" b="1" i="0" spc="86">
                 <a:solidFill>
                   <a:srgbClr val="8C5F1B"/>
                 </a:solidFill>
@@ -15288,7 +15288,7 @@
         </p:nvSpPr>
         <p:spPr>
           <a:xfrm>
-            <a:off x="685800" y="1503902"/>
+            <a:off x="685800" y="1497044"/>
             <a:ext cx="10877550" cy="142875"/>
           </a:xfrm>
           <a:prstGeom prst="rect">
@@ -15330,7 +15330,7 @@
         </p:nvSpPr>
         <p:spPr>
           <a:xfrm>
-            <a:off x="685800" y="1846802"/>
+            <a:off x="685800" y="1839944"/>
             <a:ext cx="10820400" cy="972121"/>
           </a:xfrm>
           <a:prstGeom prst="rect">
@@ -15397,7 +15397,7 @@
         </p:nvSpPr>
         <p:spPr>
           <a:xfrm>
-            <a:off x="685800" y="3057048"/>
+            <a:off x="685800" y="3050190"/>
             <a:ext cx="876300" cy="38100"/>
           </a:xfrm>
           <a:prstGeom prst="rect">
@@ -15443,7 +15443,7 @@
         </p:nvSpPr>
         <p:spPr>
           <a:xfrm>
-            <a:off x="685800" y="3380898"/>
+            <a:off x="685800" y="3374040"/>
             <a:ext cx="2590800" cy="875252"/>
           </a:xfrm>
           <a:prstGeom prst="roundRect">
@@ -15493,7 +15493,7 @@
         </p:nvSpPr>
         <p:spPr>
           <a:xfrm>
-            <a:off x="828675" y="3523773"/>
+            <a:off x="828675" y="3516915"/>
             <a:ext cx="2305050" cy="304800"/>
           </a:xfrm>
           <a:prstGeom prst="rect">
@@ -15538,7 +15538,7 @@
         </p:nvSpPr>
         <p:spPr>
           <a:xfrm>
-            <a:off x="800100" y="3933348"/>
+            <a:off x="800100" y="3926490"/>
             <a:ext cx="2362200" cy="179927"/>
           </a:xfrm>
           <a:prstGeom prst="rect">
@@ -15583,7 +15583,7 @@
         </p:nvSpPr>
         <p:spPr>
           <a:xfrm>
-            <a:off x="3429000" y="3380898"/>
+            <a:off x="3429000" y="3374040"/>
             <a:ext cx="2590800" cy="875252"/>
           </a:xfrm>
           <a:prstGeom prst="roundRect">
@@ -15633,7 +15633,7 @@
         </p:nvSpPr>
         <p:spPr>
           <a:xfrm>
-            <a:off x="3571875" y="3523773"/>
+            <a:off x="3571875" y="3516915"/>
             <a:ext cx="2305050" cy="304800"/>
           </a:xfrm>
           <a:prstGeom prst="rect">
@@ -15678,7 +15678,7 @@
         </p:nvSpPr>
         <p:spPr>
           <a:xfrm>
-            <a:off x="3543300" y="3933348"/>
+            <a:off x="3543300" y="3926490"/>
             <a:ext cx="2362200" cy="179927"/>
           </a:xfrm>
           <a:prstGeom prst="rect">
@@ -15723,7 +15723,7 @@
         </p:nvSpPr>
         <p:spPr>
           <a:xfrm>
-            <a:off x="6172200" y="3380898"/>
+            <a:off x="6172200" y="3374040"/>
             <a:ext cx="2590800" cy="875252"/>
           </a:xfrm>
           <a:prstGeom prst="roundRect">
@@ -15773,7 +15773,7 @@
         </p:nvSpPr>
         <p:spPr>
           <a:xfrm>
-            <a:off x="6315075" y="3523773"/>
+            <a:off x="6315075" y="3516915"/>
             <a:ext cx="2305050" cy="304800"/>
           </a:xfrm>
           <a:prstGeom prst="rect">
@@ -15818,7 +15818,7 @@
         </p:nvSpPr>
         <p:spPr>
           <a:xfrm>
-            <a:off x="6286500" y="3933348"/>
+            <a:off x="6286500" y="3926490"/>
             <a:ext cx="2362200" cy="179927"/>
           </a:xfrm>
           <a:prstGeom prst="rect">
@@ -15863,7 +15863,7 @@
         </p:nvSpPr>
         <p:spPr>
           <a:xfrm>
-            <a:off x="8915400" y="3380898"/>
+            <a:off x="8915400" y="3374040"/>
             <a:ext cx="2590800" cy="875252"/>
           </a:xfrm>
           <a:prstGeom prst="roundRect">
@@ -15913,7 +15913,7 @@
         </p:nvSpPr>
         <p:spPr>
           <a:xfrm>
-            <a:off x="9058275" y="3523773"/>
+            <a:off x="9058275" y="3516915"/>
             <a:ext cx="2305050" cy="304800"/>
           </a:xfrm>
           <a:prstGeom prst="rect">
@@ -15958,7 +15958,7 @@
         </p:nvSpPr>
         <p:spPr>
           <a:xfrm>
-            <a:off x="9029700" y="3933348"/>
+            <a:off x="9029700" y="3926490"/>
             <a:ext cx="2362200" cy="179927"/>
           </a:xfrm>
           <a:prstGeom prst="rect">
@@ -16003,8 +16003,8 @@
         </p:nvSpPr>
         <p:spPr>
           <a:xfrm>
-            <a:off x="685800" y="4503801"/>
-            <a:ext cx="3505200" cy="735806"/>
+            <a:off x="685800" y="4497038"/>
+            <a:ext cx="3505200" cy="749617"/>
           </a:xfrm>
           <a:prstGeom prst="rect">
             <a:avLst/>
@@ -16045,7 +16045,7 @@
         </p:nvSpPr>
         <p:spPr>
           <a:xfrm>
-            <a:off x="685800" y="4503801"/>
+            <a:off x="685800" y="4497038"/>
             <a:ext cx="3505200" cy="19050"/>
           </a:xfrm>
           <a:prstGeom prst="rect">
@@ -16089,8 +16089,8 @@
         </p:nvSpPr>
         <p:spPr>
           <a:xfrm>
-            <a:off x="685800" y="4858321"/>
-            <a:ext cx="3505200" cy="631031"/>
+            <a:off x="685800" y="4865370"/>
+            <a:ext cx="3505200" cy="644842"/>
           </a:xfrm>
           <a:prstGeom prst="rect">
             <a:avLst/>
@@ -16134,8 +16134,8 @@
         </p:nvSpPr>
         <p:spPr>
           <a:xfrm>
-            <a:off x="685800" y="4637151"/>
-            <a:ext cx="3562350" cy="144970"/>
+            <a:off x="685800" y="4639913"/>
+            <a:ext cx="3562350" cy="158781"/>
           </a:xfrm>
           <a:prstGeom prst="rect">
             <a:avLst/>
@@ -16150,7 +16150,7 @@
           <a:p>
             <a:pPr algn="l">
               <a:lnSpc>
-                <a:spcPts val="1141"/>
+                <a:spcPts val="1250"/>
               </a:lnSpc>
               <a:spcBef>
                 <a:spcPts val="0"/>
@@ -16160,7 +16160,7 @@
               </a:spcAft>
             </a:pPr>
             <a:r>
-              <a:rPr sz="787" b="1" i="0" spc="102">
+              <a:rPr sz="862" b="1" i="0" spc="112">
                 <a:solidFill>
                   <a:srgbClr val="B8ACB1"/>
                 </a:solidFill>
@@ -16179,8 +16179,8 @@
         </p:nvSpPr>
         <p:spPr>
           <a:xfrm>
-            <a:off x="4343400" y="4503801"/>
-            <a:ext cx="3505200" cy="735806"/>
+            <a:off x="4343400" y="4497038"/>
+            <a:ext cx="3505200" cy="749617"/>
           </a:xfrm>
           <a:prstGeom prst="rect">
             <a:avLst/>
@@ -16221,7 +16221,7 @@
         </p:nvSpPr>
         <p:spPr>
           <a:xfrm>
-            <a:off x="4343400" y="4503801"/>
+            <a:off x="4343400" y="4497038"/>
             <a:ext cx="3505200" cy="19050"/>
           </a:xfrm>
           <a:prstGeom prst="rect">
@@ -16265,8 +16265,8 @@
         </p:nvSpPr>
         <p:spPr>
           <a:xfrm>
-            <a:off x="4343400" y="4858321"/>
-            <a:ext cx="3505200" cy="631031"/>
+            <a:off x="4343400" y="4865370"/>
+            <a:ext cx="3505200" cy="644842"/>
           </a:xfrm>
           <a:prstGeom prst="rect">
             <a:avLst/>
@@ -16310,8 +16310,8 @@
         </p:nvSpPr>
         <p:spPr>
           <a:xfrm>
-            <a:off x="4343400" y="4637151"/>
-            <a:ext cx="3562350" cy="144970"/>
+            <a:off x="4343400" y="4639913"/>
+            <a:ext cx="3562350" cy="158781"/>
           </a:xfrm>
           <a:prstGeom prst="rect">
             <a:avLst/>
@@ -16326,7 +16326,7 @@
           <a:p>
             <a:pPr algn="l">
               <a:lnSpc>
-                <a:spcPts val="1141"/>
+                <a:spcPts val="1250"/>
               </a:lnSpc>
               <a:spcBef>
                 <a:spcPts val="0"/>
@@ -16336,7 +16336,7 @@
               </a:spcAft>
             </a:pPr>
             <a:r>
-              <a:rPr sz="787" b="1" i="0" spc="102">
+              <a:rPr sz="862" b="1" i="0" spc="112">
                 <a:solidFill>
                   <a:srgbClr val="B8ACB1"/>
                 </a:solidFill>
@@ -16355,8 +16355,8 @@
         </p:nvSpPr>
         <p:spPr>
           <a:xfrm>
-            <a:off x="8001000" y="4503801"/>
-            <a:ext cx="3505200" cy="735806"/>
+            <a:off x="8001000" y="4497038"/>
+            <a:ext cx="3505200" cy="749617"/>
           </a:xfrm>
           <a:prstGeom prst="rect">
             <a:avLst/>
@@ -16397,7 +16397,7 @@
         </p:nvSpPr>
         <p:spPr>
           <a:xfrm>
-            <a:off x="8001000" y="4503801"/>
+            <a:off x="8001000" y="4497038"/>
             <a:ext cx="3505200" cy="19050"/>
           </a:xfrm>
           <a:prstGeom prst="rect">
@@ -16441,8 +16441,8 @@
         </p:nvSpPr>
         <p:spPr>
           <a:xfrm>
-            <a:off x="8001000" y="4858321"/>
-            <a:ext cx="3505200" cy="631031"/>
+            <a:off x="8001000" y="4865370"/>
+            <a:ext cx="3505200" cy="644842"/>
           </a:xfrm>
           <a:prstGeom prst="rect">
             <a:avLst/>
@@ -16486,8 +16486,8 @@
         </p:nvSpPr>
         <p:spPr>
           <a:xfrm>
-            <a:off x="8001000" y="4637151"/>
-            <a:ext cx="3562350" cy="144970"/>
+            <a:off x="8001000" y="4639913"/>
+            <a:ext cx="3562350" cy="158781"/>
           </a:xfrm>
           <a:prstGeom prst="rect">
             <a:avLst/>
@@ -16502,7 +16502,7 @@
           <a:p>
             <a:pPr algn="l">
               <a:lnSpc>
-                <a:spcPts val="1141"/>
+                <a:spcPts val="1250"/>
               </a:lnSpc>
               <a:spcBef>
                 <a:spcPts val="0"/>
@@ -16512,7 +16512,7 @@
               </a:spcAft>
             </a:pPr>
             <a:r>
-              <a:rPr sz="787" b="1" i="0" spc="102">
+              <a:rPr sz="862" b="1" i="0" spc="112">
                 <a:solidFill>
                   <a:srgbClr val="B8ACB1"/>
                 </a:solidFill>
@@ -17048,7 +17048,7 @@
         <p:spPr>
           <a:xfrm>
             <a:off x="809625" y="1481613"/>
-            <a:ext cx="3147536" cy="114300"/>
+            <a:ext cx="3282886" cy="114300"/>
           </a:xfrm>
           <a:prstGeom prst="rect">
             <a:avLst/>
@@ -17090,7 +17090,7 @@
               </a:spcAft>
             </a:pPr>
             <a:r>
-              <a:rPr sz="825" b="1" i="0" spc="82">
+              <a:rPr sz="862" b="1" i="0" spc="86">
                 <a:solidFill>
                   <a:srgbClr val="5F1937"/>
                 </a:solidFill>
@@ -17980,7 +17980,7 @@
         <p:spPr>
           <a:xfrm>
             <a:off x="809625" y="4042314"/>
-            <a:ext cx="2890075" cy="114300"/>
+            <a:ext cx="3013805" cy="114300"/>
           </a:xfrm>
           <a:prstGeom prst="rect">
             <a:avLst/>
@@ -18022,7 +18022,7 @@
               </a:spcAft>
             </a:pPr>
             <a:r>
-              <a:rPr sz="825" b="1" i="0" spc="82">
+              <a:rPr sz="862" b="1" i="0" spc="86">
                 <a:solidFill>
                   <a:srgbClr val="5F1937"/>
                 </a:solidFill>
@@ -18906,7 +18906,7 @@
         <p:spPr>
           <a:xfrm>
             <a:off x="809625" y="2030158"/>
-            <a:ext cx="3386994" cy="114300"/>
+            <a:ext cx="3533203" cy="114300"/>
           </a:xfrm>
           <a:prstGeom prst="rect">
             <a:avLst/>
@@ -18948,7 +18948,7 @@
               </a:spcAft>
             </a:pPr>
             <a:r>
-              <a:rPr sz="825" b="1" i="0" spc="82">
+              <a:rPr sz="862" b="1" i="0" spc="86">
                 <a:solidFill>
                   <a:srgbClr val="5F1937"/>
                 </a:solidFill>
@@ -19359,7 +19359,7 @@
         <p:spPr>
           <a:xfrm>
             <a:off x="6391275" y="2030158"/>
-            <a:ext cx="3530917" cy="114300"/>
+            <a:ext cx="3683603" cy="114300"/>
           </a:xfrm>
           <a:prstGeom prst="rect">
             <a:avLst/>
@@ -19401,7 +19401,7 @@
               </a:spcAft>
             </a:pPr>
             <a:r>
-              <a:rPr sz="825" b="1" i="0" spc="82">
+              <a:rPr sz="862" b="1" i="0" spc="86">
                 <a:solidFill>
                   <a:srgbClr val="5F1937"/>
                 </a:solidFill>
@@ -20538,7 +20538,7 @@
         <p:spPr>
           <a:xfrm>
             <a:off x="809625" y="1700498"/>
-            <a:ext cx="5174932" cy="114300"/>
+            <a:ext cx="5402294" cy="114300"/>
           </a:xfrm>
           <a:prstGeom prst="rect">
             <a:avLst/>
@@ -20580,7 +20580,7 @@
               </a:spcAft>
             </a:pPr>
             <a:r>
-              <a:rPr sz="825" b="1" i="0" spc="82">
+              <a:rPr sz="862" b="1" i="0" spc="86">
                 <a:solidFill>
                   <a:srgbClr val="5F1937"/>
                 </a:solidFill>
@@ -20852,7 +20852,7 @@
               </a:spcAft>
             </a:pPr>
             <a:r>
-              <a:rPr sz="787" b="1" i="0" spc="71">
+              <a:rPr sz="862" b="1" i="0" spc="78">
                 <a:solidFill>
                   <a:srgbClr val="5F1937"/>
                 </a:solidFill>
@@ -21094,11 +21094,11 @@
         <p:spPr>
           <a:xfrm>
             <a:off x="923925" y="4030313"/>
-            <a:ext cx="881919" cy="161925"/>
+            <a:ext cx="988695" cy="171450"/>
           </a:xfrm>
           <a:prstGeom prst="roundRect">
             <a:avLst>
-              <a:gd name="adj" fmla="val 47058"/>
+              <a:gd name="adj" fmla="val 44444"/>
             </a:avLst>
           </a:prstGeom>
           <a:solidFill>
@@ -21138,7 +21138,7 @@
               </a:spcAft>
             </a:pPr>
             <a:r>
-              <a:rPr sz="750" b="1" i="0" spc="52">
+              <a:rPr sz="862" b="1" i="0" spc="60">
                 <a:solidFill>
                   <a:srgbClr val="431127"/>
                 </a:solidFill>
@@ -21157,7 +21157,7 @@
         </p:nvSpPr>
         <p:spPr>
           <a:xfrm>
-            <a:off x="923925" y="4239863"/>
+            <a:off x="923925" y="4249388"/>
             <a:ext cx="1785366" cy="316706"/>
           </a:xfrm>
           <a:prstGeom prst="rect">
@@ -21479,7 +21479,7 @@
               </a:spcAft>
             </a:pPr>
             <a:r>
-              <a:rPr sz="787" b="1" i="0" spc="71">
+              <a:rPr sz="862" b="1" i="0" spc="78">
                 <a:solidFill>
                   <a:srgbClr val="5F1937"/>
                 </a:solidFill>
@@ -21721,15 +21721,15 @@
         <p:spPr>
           <a:xfrm>
             <a:off x="3204591" y="4030313"/>
-            <a:ext cx="1063942" cy="161925"/>
+            <a:ext cx="1197959" cy="171450"/>
           </a:xfrm>
           <a:prstGeom prst="roundRect">
             <a:avLst>
-              <a:gd name="adj" fmla="val 47058"/>
+              <a:gd name="adj" fmla="val 44444"/>
             </a:avLst>
           </a:prstGeom>
           <a:solidFill>
-            <a:srgbClr val="F0E3C7"/>
+            <a:srgbClr val="F2E6CD"/>
           </a:solidFill>
           <a:ln>
             <a:noFill/>
@@ -21765,7 +21765,7 @@
               </a:spcAft>
             </a:pPr>
             <a:r>
-              <a:rPr sz="750" b="1" i="0" spc="52">
+              <a:rPr sz="862" b="1" i="0" spc="60">
                 <a:solidFill>
                   <a:srgbClr val="8C5F1B"/>
                 </a:solidFill>
@@ -21784,7 +21784,7 @@
         </p:nvSpPr>
         <p:spPr>
           <a:xfrm>
-            <a:off x="3204591" y="4239863"/>
+            <a:off x="3204591" y="4249388"/>
             <a:ext cx="1785461" cy="316706"/>
           </a:xfrm>
           <a:prstGeom prst="rect">
@@ -22106,7 +22106,7 @@
               </a:spcAft>
             </a:pPr>
             <a:r>
-              <a:rPr sz="787" b="1" i="0" spc="71">
+              <a:rPr sz="862" b="1" i="0" spc="78">
                 <a:solidFill>
                   <a:srgbClr val="5F1937"/>
                 </a:solidFill>
@@ -22348,11 +22348,11 @@
         <p:spPr>
           <a:xfrm>
             <a:off x="5485352" y="4030313"/>
-            <a:ext cx="881919" cy="161925"/>
+            <a:ext cx="988695" cy="171450"/>
           </a:xfrm>
           <a:prstGeom prst="roundRect">
             <a:avLst>
-              <a:gd name="adj" fmla="val 47058"/>
+              <a:gd name="adj" fmla="val 44444"/>
             </a:avLst>
           </a:prstGeom>
           <a:solidFill>
@@ -22392,7 +22392,7 @@
               </a:spcAft>
             </a:pPr>
             <a:r>
-              <a:rPr sz="750" b="1" i="0" spc="52">
+              <a:rPr sz="862" b="1" i="0" spc="60">
                 <a:solidFill>
                   <a:srgbClr val="431127"/>
                 </a:solidFill>
@@ -22411,7 +22411,7 @@
         </p:nvSpPr>
         <p:spPr>
           <a:xfrm>
-            <a:off x="5485352" y="4239863"/>
+            <a:off x="5485352" y="4249388"/>
             <a:ext cx="1785366" cy="316706"/>
           </a:xfrm>
           <a:prstGeom prst="rect">
@@ -22733,7 +22733,7 @@
               </a:spcAft>
             </a:pPr>
             <a:r>
-              <a:rPr sz="787" b="1" i="0" spc="71">
+              <a:rPr sz="862" b="1" i="0" spc="78">
                 <a:solidFill>
                   <a:srgbClr val="5F1937"/>
                 </a:solidFill>
@@ -22975,15 +22975,15 @@
         <p:spPr>
           <a:xfrm>
             <a:off x="7766018" y="4030313"/>
-            <a:ext cx="1063942" cy="161925"/>
+            <a:ext cx="1197959" cy="171450"/>
           </a:xfrm>
           <a:prstGeom prst="roundRect">
             <a:avLst>
-              <a:gd name="adj" fmla="val 47058"/>
+              <a:gd name="adj" fmla="val 44444"/>
             </a:avLst>
           </a:prstGeom>
           <a:solidFill>
-            <a:srgbClr val="F0E3C7"/>
+            <a:srgbClr val="F2E6CD"/>
           </a:solidFill>
           <a:ln>
             <a:noFill/>
@@ -23019,7 +23019,7 @@
               </a:spcAft>
             </a:pPr>
             <a:r>
-              <a:rPr sz="750" b="1" i="0" spc="52">
+              <a:rPr sz="862" b="1" i="0" spc="60">
                 <a:solidFill>
                   <a:srgbClr val="8C5F1B"/>
                 </a:solidFill>
@@ -23038,7 +23038,7 @@
         </p:nvSpPr>
         <p:spPr>
           <a:xfrm>
-            <a:off x="7766018" y="4239863"/>
+            <a:off x="7766018" y="4249388"/>
             <a:ext cx="1785366" cy="316706"/>
           </a:xfrm>
           <a:prstGeom prst="rect">
@@ -23380,7 +23380,7 @@
         <p:spPr>
           <a:xfrm>
             <a:off x="809625" y="4839938"/>
-            <a:ext cx="3330797" cy="114300"/>
+            <a:ext cx="3474434" cy="114300"/>
           </a:xfrm>
           <a:prstGeom prst="rect">
             <a:avLst/>
@@ -23422,7 +23422,7 @@
               </a:spcAft>
             </a:pPr>
             <a:r>
-              <a:rPr sz="825" b="1" i="0" spc="82">
+              <a:rPr sz="862" b="1" i="0" spc="86">
                 <a:solidFill>
                   <a:srgbClr val="5F1937"/>
                 </a:solidFill>
@@ -24234,7 +24234,7 @@
         <p:spPr>
           <a:xfrm>
             <a:off x="809625" y="1880330"/>
-            <a:ext cx="4198715" cy="114300"/>
+            <a:ext cx="4381785" cy="114300"/>
           </a:xfrm>
           <a:prstGeom prst="rect">
             <a:avLst/>
@@ -24276,7 +24276,7 @@
               </a:spcAft>
             </a:pPr>
             <a:r>
-              <a:rPr sz="825" b="1" i="0" spc="82">
+              <a:rPr sz="862" b="1" i="0" spc="86">
                 <a:solidFill>
                   <a:srgbClr val="5F1937"/>
                 </a:solidFill>
@@ -26090,7 +26090,7 @@
         <p:spPr>
           <a:xfrm>
             <a:off x="7244238" y="1880330"/>
-            <a:ext cx="4181189" cy="114300"/>
+            <a:ext cx="4363497" cy="114300"/>
           </a:xfrm>
           <a:prstGeom prst="rect">
             <a:avLst/>
@@ -26132,7 +26132,7 @@
               </a:spcAft>
             </a:pPr>
             <a:r>
-              <a:rPr sz="825" b="1" i="0" spc="82">
+              <a:rPr sz="862" b="1" i="0" spc="86">
                 <a:solidFill>
                   <a:srgbClr val="5F1937"/>
                 </a:solidFill>
@@ -27094,7 +27094,7 @@
         <p:spPr>
           <a:xfrm>
             <a:off x="809625" y="1949672"/>
-            <a:ext cx="4459224" cy="114300"/>
+            <a:ext cx="4654010" cy="114300"/>
           </a:xfrm>
           <a:prstGeom prst="rect">
             <a:avLst/>
@@ -27136,7 +27136,7 @@
               </a:spcAft>
             </a:pPr>
             <a:r>
-              <a:rPr sz="825" b="1" i="0" spc="82">
+              <a:rPr sz="862" b="1" i="0" spc="86">
                 <a:solidFill>
                   <a:srgbClr val="5F1937"/>
                 </a:solidFill>
@@ -28179,7 +28179,7 @@
             </a:avLst>
           </a:prstGeom>
           <a:solidFill>
-            <a:srgbClr val="C08A2E"/>
+            <a:srgbClr val="8C5F1B"/>
           </a:solidFill>
           <a:ln>
             <a:noFill/>
@@ -29856,7 +29856,7 @@
         <p:spPr>
           <a:xfrm>
             <a:off x="809625" y="2059209"/>
-            <a:ext cx="4395978" cy="114300"/>
+            <a:ext cx="4588097" cy="114300"/>
           </a:xfrm>
           <a:prstGeom prst="rect">
             <a:avLst/>
@@ -29898,7 +29898,7 @@
               </a:spcAft>
             </a:pPr>
             <a:r>
-              <a:rPr sz="825" b="1" i="0" spc="82">
+              <a:rPr sz="862" b="1" i="0" spc="86">
                 <a:solidFill>
                   <a:srgbClr val="5F1937"/>
                 </a:solidFill>
@@ -32261,7 +32261,7 @@
         <p:spPr>
           <a:xfrm>
             <a:off x="809625" y="1383315"/>
-            <a:ext cx="3504342" cy="114300"/>
+            <a:ext cx="3655790" cy="114300"/>
           </a:xfrm>
           <a:prstGeom prst="rect">
             <a:avLst/>
@@ -32303,7 +32303,7 @@
               </a:spcAft>
             </a:pPr>
             <a:r>
-              <a:rPr sz="825" b="1" i="0" spc="82">
+              <a:rPr sz="862" b="1" i="0" spc="86">
                 <a:solidFill>
                   <a:srgbClr val="5F1937"/>
                 </a:solidFill>
@@ -33619,7 +33619,7 @@
         <p:spPr>
           <a:xfrm>
             <a:off x="809625" y="3326415"/>
-            <a:ext cx="2045208" cy="114300"/>
+            <a:ext cx="2130361" cy="114300"/>
           </a:xfrm>
           <a:prstGeom prst="rect">
             <a:avLst/>
@@ -33661,7 +33661,7 @@
               </a:spcAft>
             </a:pPr>
             <a:r>
-              <a:rPr sz="825" b="1" i="0" spc="82">
+              <a:rPr sz="862" b="1" i="0" spc="86">
                 <a:solidFill>
                   <a:srgbClr val="5F1937"/>
                 </a:solidFill>
@@ -38065,7 +38065,7 @@
         <p:spPr>
           <a:xfrm>
             <a:off x="809625" y="1543240"/>
-            <a:ext cx="5025961" cy="114300"/>
+            <a:ext cx="5246655" cy="114300"/>
           </a:xfrm>
           <a:prstGeom prst="rect">
             <a:avLst/>
@@ -38107,7 +38107,7 @@
               </a:spcAft>
             </a:pPr>
             <a:r>
-              <a:rPr sz="825" b="1" i="0" spc="82">
+              <a:rPr sz="862" b="1" i="0" spc="86">
                 <a:solidFill>
                   <a:srgbClr val="5F1937"/>
                 </a:solidFill>
@@ -40104,7 +40104,7 @@
         <p:spPr>
           <a:xfrm>
             <a:off x="809625" y="4502372"/>
-            <a:ext cx="2940272" cy="114300"/>
+            <a:ext cx="3066192" cy="114300"/>
           </a:xfrm>
           <a:prstGeom prst="rect">
             <a:avLst/>
@@ -40146,7 +40146,7 @@
               </a:spcAft>
             </a:pPr>
             <a:r>
-              <a:rPr sz="825" b="1" i="0" spc="82">
+              <a:rPr sz="862" b="1" i="0" spc="86">
                 <a:solidFill>
                   <a:srgbClr val="5F1937"/>
                 </a:solidFill>
@@ -40419,7 +40419,7 @@
         <p:spPr>
           <a:xfrm>
             <a:off x="6381750" y="4502372"/>
-            <a:ext cx="4076890" cy="114300"/>
+            <a:ext cx="4254436" cy="114300"/>
           </a:xfrm>
           <a:prstGeom prst="rect">
             <a:avLst/>
@@ -40461,7 +40461,7 @@
               </a:spcAft>
             </a:pPr>
             <a:r>
-              <a:rPr sz="825" b="1" i="0" spc="82">
+              <a:rPr sz="862" b="1" i="0" spc="86">
                 <a:solidFill>
                   <a:srgbClr val="5F1937"/>
                 </a:solidFill>
